--- a/18-ds-proyecto-final/35-Proyecto-final.pptx
+++ b/18-ds-proyecto-final/35-Proyecto-final.pptx
@@ -104,7 +104,7 @@
                 <a:tab algn="l" pos="0"/>
               </a:tabLst>
             </a:pPr>
-            <a:fld id="{AD9E425E-4FC4-4076-8080-6B8B2176CBBD}" type="slidenum">
+            <a:fld id="{EBA7195C-1115-4622-91E6-D88A89DABC47}" type="slidenum">
               <a:rPr b="0" lang="en" sz="1000" strike="noStrike" u="none">
                 <a:solidFill>
                   <a:schemeClr val="dk2"/>
@@ -114,7 +114,7 @@
                 <a:latin typeface="Arial"/>
                 <a:ea typeface="Arial"/>
               </a:rPr>
-              <a:t>&lt;número&gt;</a:t>
+              <a:t>7</a:t>
             </a:fld>
             <a:endParaRPr b="0" lang="es-MX" sz="1000" strike="noStrike" u="none">
               <a:solidFill>
@@ -820,7 +820,7 @@
                 <a:tab algn="l" pos="0"/>
               </a:tabLst>
             </a:pPr>
-            <a:fld id="{A6776319-EF73-41A2-AA96-C45B5395C95E}" type="slidenum">
+            <a:fld id="{42FCFC83-FBDB-4D25-B574-CC2598B8C9F8}" type="slidenum">
               <a:rPr b="0" lang="en" sz="1000" strike="noStrike" u="none">
                 <a:solidFill>
                   <a:schemeClr val="dk2"/>
@@ -2084,7 +2084,7 @@
                 <a:tab algn="l" pos="0"/>
               </a:tabLst>
             </a:pPr>
-            <a:fld id="{5C17B7B1-F4F4-4E33-AC68-1240736FBAB6}" type="slidenum">
+            <a:fld id="{6EDCD056-5932-43A0-BA10-EBCC6D5CF365}" type="slidenum">
               <a:rPr b="0" lang="en" sz="1000" strike="noStrike" u="none">
                 <a:solidFill>
                   <a:schemeClr val="dk2"/>
@@ -3896,7 +3896,7 @@
                 <a:tab algn="l" pos="0"/>
               </a:tabLst>
             </a:pPr>
-            <a:fld id="{1DAE516B-A3AC-4B06-8D8E-348AC8C0B34C}" type="slidenum">
+            <a:fld id="{C13F6A59-F345-4101-83F3-E112971B5A96}" type="slidenum">
               <a:rPr b="0" lang="en" sz="1000" strike="noStrike" u="none">
                 <a:solidFill>
                   <a:schemeClr val="dk2"/>
@@ -4005,7 +4005,7 @@
                 <a:tab algn="l" pos="0"/>
               </a:tabLst>
             </a:pPr>
-            <a:fld id="{4FD19C32-5DB2-4F0C-91C8-31DB21370E33}" type="slidenum">
+            <a:fld id="{8188C440-142D-4DA8-B63A-43B1EB2A284A}" type="slidenum">
               <a:rPr b="0" lang="en" sz="1000" strike="noStrike" u="none">
                 <a:solidFill>
                   <a:schemeClr val="dk2"/>
@@ -4506,7 +4506,7 @@
                 <a:tab algn="l" pos="0"/>
               </a:tabLst>
             </a:pPr>
-            <a:fld id="{7962CC15-5F01-45FC-9240-4D91B24F9C2D}" type="slidenum">
+            <a:fld id="{CF7AABED-95D0-4DA2-83ED-93C7D7E94738}" type="slidenum">
               <a:rPr b="0" lang="en" sz="1000" strike="noStrike" u="none">
                 <a:solidFill>
                   <a:schemeClr val="dk2"/>
@@ -4948,7 +4948,7 @@
                 <a:tab algn="l" pos="0"/>
               </a:tabLst>
             </a:pPr>
-            <a:fld id="{00CCF93F-DE2F-4865-900F-2648A8BD29E5}" type="slidenum">
+            <a:fld id="{4BEBBEE3-4DCD-48A5-B1AB-6274C2874A86}" type="slidenum">
               <a:rPr b="0" lang="en" sz="1000" strike="noStrike" u="none">
                 <a:solidFill>
                   <a:schemeClr val="dk2"/>
@@ -5664,7 +5664,7 @@
                 <a:tab algn="l" pos="0"/>
               </a:tabLst>
             </a:pPr>
-            <a:fld id="{361F496D-C50D-4C20-8B80-49EA06404143}" type="slidenum">
+            <a:fld id="{B36A92AE-ADA6-4605-BE8D-8002CD15B273}" type="slidenum">
               <a:rPr b="0" lang="en" sz="1000" strike="noStrike" u="none">
                 <a:solidFill>
                   <a:schemeClr val="dk2"/>
@@ -5832,7 +5832,7 @@
                 <a:tab algn="l" pos="0"/>
               </a:tabLst>
             </a:pPr>
-            <a:fld id="{47EC6023-7D2C-4F9A-8429-6173279B29D7}" type="slidenum">
+            <a:fld id="{32300DCA-EA5D-4D37-8091-6C3992FD8020}" type="slidenum">
               <a:rPr b="0" lang="en" sz="1000" strike="noStrike" u="none">
                 <a:solidFill>
                   <a:schemeClr val="dk2"/>
@@ -5941,7 +5941,7 @@
                 <a:tab algn="l" pos="0"/>
               </a:tabLst>
             </a:pPr>
-            <a:fld id="{EDEAAF5A-D9C1-4C20-A2D1-521AFC45656C}" type="slidenum">
+            <a:fld id="{19496454-16BD-42AF-A870-416D21BADA33}" type="slidenum">
               <a:rPr b="0" lang="en" sz="1000" strike="noStrike" u="none">
                 <a:solidFill>
                   <a:schemeClr val="dk2"/>
@@ -6931,7 +6931,7 @@
                 <a:tab algn="l" pos="0"/>
               </a:tabLst>
             </a:pPr>
-            <a:fld id="{635B1020-C019-4DF4-8024-3FEBF5CA0565}" type="slidenum">
+            <a:fld id="{C1E96CCE-D85B-4DA3-9C46-55C0F70A681D}" type="slidenum">
               <a:rPr b="0" lang="en" sz="1000" strike="noStrike" u="none">
                 <a:solidFill>
                   <a:schemeClr val="dk2"/>
@@ -7099,7 +7099,7 @@
                 <a:tab algn="l" pos="0"/>
               </a:tabLst>
             </a:pPr>
-            <a:fld id="{FE83BE18-EEE2-478D-84FE-52DEE3052689}" type="slidenum">
+            <a:fld id="{61D130CA-BCDF-433C-A35F-4D2DBB1B58CF}" type="slidenum">
               <a:rPr b="0" lang="en" sz="1000" strike="noStrike" u="none">
                 <a:solidFill>
                   <a:schemeClr val="dk2"/>
@@ -7109,7 +7109,7 @@
                 <a:latin typeface="Arial"/>
                 <a:ea typeface="Arial"/>
               </a:rPr>
-              <a:t>&lt;número&gt;</a:t>
+              <a:t>7</a:t>
             </a:fld>
             <a:endParaRPr b="0" lang="es-MX" sz="1000" strike="noStrike" u="none">
               <a:solidFill>
@@ -8089,7 +8089,7 @@
                 <a:tab algn="l" pos="0"/>
               </a:tabLst>
             </a:pPr>
-            <a:fld id="{12394B1F-42CA-400C-A091-CE80D9BECE6B}" type="slidenum">
+            <a:fld id="{ABCE6833-EFA5-4F8D-AF05-6227254890FE}" type="slidenum">
               <a:rPr b="0" lang="en" sz="1000" strike="noStrike" u="none">
                 <a:solidFill>
                   <a:schemeClr val="dk2"/>
@@ -9079,7 +9079,7 @@
                 <a:tab algn="l" pos="0"/>
               </a:tabLst>
             </a:pPr>
-            <a:fld id="{29C38D73-95E3-47A0-996D-0D8D2B04B829}" type="slidenum">
+            <a:fld id="{08F8394F-B7C4-4D2B-8736-E4BDE279B1D6}" type="slidenum">
               <a:rPr b="0" lang="en" sz="1000" strike="noStrike" u="none">
                 <a:solidFill>
                   <a:schemeClr val="dk2"/>
@@ -9795,7 +9795,7 @@
                 <a:tab algn="l" pos="0"/>
               </a:tabLst>
             </a:pPr>
-            <a:fld id="{27902532-0527-4BDB-9438-7257E3BF693B}" type="slidenum">
+            <a:fld id="{EE573BB3-FFA7-4071-9881-638E5ACDCA62}" type="slidenum">
               <a:rPr b="0" lang="en" sz="1000" strike="noStrike" u="none">
                 <a:solidFill>
                   <a:schemeClr val="dk2"/>
@@ -11059,7 +11059,7 @@
                 <a:tab algn="l" pos="0"/>
               </a:tabLst>
             </a:pPr>
-            <a:fld id="{A7AD8C73-534F-4AD9-A027-1D650E38A40F}" type="slidenum">
+            <a:fld id="{8E39CF39-8572-47D7-A1FD-DDC86A74A5A4}" type="slidenum">
               <a:rPr b="0" lang="en" sz="1000" strike="noStrike" u="none">
                 <a:solidFill>
                   <a:schemeClr val="dk2"/>
@@ -12871,7 +12871,7 @@
                 <a:tab algn="l" pos="0"/>
               </a:tabLst>
             </a:pPr>
-            <a:fld id="{7B0C4A3E-444D-4266-BD3E-97A89B260216}" type="slidenum">
+            <a:fld id="{870DE779-EF53-46DA-878C-D18CEE0B9C1A}" type="slidenum">
               <a:rPr b="0" lang="en" sz="1000" strike="noStrike" u="none">
                 <a:solidFill>
                   <a:schemeClr val="dk2"/>
@@ -12930,7 +12930,7 @@
         <p:txBody>
           <a:bodyPr/>
           <a:p>
-            <a:fld id="{26DF2B83-E5E4-469B-85ED-8A97ED2777E5}" type="slidenum">
+            <a:fld id="{ACA9CA3A-4713-412B-B226-EC3BC157A9FE}" type="slidenum">
               <a:t>&lt;#&gt;</a:t>
             </a:fld>
           </a:p>
@@ -12972,7 +12972,7 @@
         <p:txBody>
           <a:bodyPr/>
           <a:p>
-            <a:fld id="{29838D28-75CF-415C-9B83-878CD64A15B8}" type="slidenum">
+            <a:fld id="{0320791B-3155-456B-86F7-EA755D80CF80}" type="slidenum">
               <a:t>&lt;#&gt;</a:t>
             </a:fld>
           </a:p>
@@ -13397,7 +13397,7 @@
                 <a:tab algn="l" pos="0"/>
               </a:tabLst>
             </a:pPr>
-            <a:fld id="{2A386A51-3E56-4B58-8B0E-221B943A7E96}" type="slidenum">
+            <a:fld id="{A3970956-FF76-46AC-A733-1B13B84E257B}" type="slidenum">
               <a:rPr b="0" lang="en" sz="1000" strike="noStrike" u="none">
                 <a:solidFill>
                   <a:schemeClr val="dk2"/>
@@ -14113,7 +14113,7 @@
                 <a:tab algn="l" pos="0"/>
               </a:tabLst>
             </a:pPr>
-            <a:fld id="{68D27D04-8412-494F-BCCD-9CAB0CFDBC48}" type="slidenum">
+            <a:fld id="{82F15ED4-82AD-4609-99CD-DC5867CDEC8C}" type="slidenum">
               <a:rPr b="0" lang="en" sz="1000" strike="noStrike" u="none">
                 <a:solidFill>
                   <a:schemeClr val="dk2"/>
@@ -14281,7 +14281,7 @@
                 <a:tab algn="l" pos="0"/>
               </a:tabLst>
             </a:pPr>
-            <a:fld id="{72ED5760-E698-4525-9B03-766C2922F6B5}" type="slidenum">
+            <a:fld id="{34884DD3-A7DE-405E-90E1-5F0CDE0880F4}" type="slidenum">
               <a:rPr b="0" lang="en" sz="1000" strike="noStrike" u="none">
                 <a:solidFill>
                   <a:schemeClr val="dk2"/>
@@ -14390,7 +14390,7 @@
                 <a:tab algn="l" pos="0"/>
               </a:tabLst>
             </a:pPr>
-            <a:fld id="{73FFD3FB-33DC-4CAD-892E-74F321F5856C}" type="slidenum">
+            <a:fld id="{B5B93967-BE76-4AB4-A9A9-10C58C0B3DD5}" type="slidenum">
               <a:rPr b="0" lang="en" sz="1000" strike="noStrike" u="none">
                 <a:solidFill>
                   <a:schemeClr val="dk2"/>
@@ -15380,7 +15380,7 @@
                 <a:tab algn="l" pos="0"/>
               </a:tabLst>
             </a:pPr>
-            <a:fld id="{E31D8B65-8988-4B8C-9A48-59BB02786E54}" type="slidenum">
+            <a:fld id="{7AE1E0FC-6CF5-4921-B2C7-25412608E689}" type="slidenum">
               <a:rPr b="0" lang="en" sz="1000" strike="noStrike" u="none">
                 <a:solidFill>
                   <a:schemeClr val="dk2"/>
@@ -16370,7 +16370,7 @@
                 <a:tab algn="l" pos="0"/>
               </a:tabLst>
             </a:pPr>
-            <a:fld id="{D8E39457-922E-4DF0-98B8-E6836F381871}" type="slidenum">
+            <a:fld id="{6C6039AF-1521-45F2-AF82-E2F2970E7A60}" type="slidenum">
               <a:rPr b="0" lang="en" sz="1000" strike="noStrike" u="none">
                 <a:solidFill>
                   <a:schemeClr val="dk2"/>
@@ -17360,7 +17360,7 @@
                 <a:tab algn="l" pos="0"/>
               </a:tabLst>
             </a:pPr>
-            <a:fld id="{D685C11D-2FFB-4CC0-BBBD-B8A1431E03FF}" type="slidenum">
+            <a:fld id="{979635A8-45C9-4B3D-9DF1-782C41B1886B}" type="slidenum">
               <a:rPr b="0" lang="en" sz="1000" strike="noStrike" u="none">
                 <a:solidFill>
                   <a:schemeClr val="dk2"/>
@@ -17543,7 +17543,7 @@
                 <a:tab algn="l" pos="0"/>
               </a:tabLst>
             </a:pPr>
-            <a:fld id="{EB9AFA7F-92F2-425B-9450-44870AB4825D}" type="slidenum">
+            <a:fld id="{A553EC70-D00C-4678-90BF-A327458EA93D}" type="slidenum">
               <a:rPr b="0" lang="en" sz="1000" strike="noStrike" u="none">
                 <a:solidFill>
                   <a:schemeClr val="dk2"/>
@@ -17962,7 +17962,7 @@
                 <a:tab algn="l" pos="0"/>
               </a:tabLst>
             </a:pPr>
-            <a:fld id="{B883667D-1173-47AB-B567-56FE0CE1C8E8}" type="slidenum">
+            <a:fld id="{43BB94A7-F5BB-40B5-BE20-F10291F061CA}" type="slidenum">
               <a:rPr b="0" lang="en" sz="1000" strike="noStrike" u="none">
                 <a:solidFill>
                   <a:schemeClr val="dk2"/>
@@ -18478,7 +18478,7 @@
                 <a:tab algn="l" pos="0"/>
               </a:tabLst>
             </a:pPr>
-            <a:fld id="{41CE8E91-ED28-43F8-AD1A-B5CBA252FFC4}" type="datetime5">
+            <a:fld id="{07FE60B3-5F4F-4AE0-9E96-E99A5375E111}" type="datetime5">
               <a:rPr b="0" lang="en" sz="1200" strike="noStrike" u="none">
                 <a:solidFill>
                   <a:srgbClr val="2a2a2a"/>
